--- a/Portfolio-Highlights.pptx
+++ b/Portfolio-Highlights.pptx
@@ -17,9 +17,10 @@
     <p:sldId id="265" r:id="rId11"/>
     <p:sldId id="266" r:id="rId12"/>
     <p:sldId id="267" r:id="rId13"/>
+    <p:sldId id="268" r:id="rId14"/>
   </p:sldIdLst>
   <p:notesMasterIdLst>
-    <p:notesMasterId r:id="rId14"/>
+    <p:notesMasterId r:id="rId15"/>
   </p:notesMasterIdLst>
   <p:sldSz cx="13004597" cy="9753905"/>
   <p:notesSz cx="9753905" cy="13004597"/>
@@ -777,7 +778,7 @@
           <a:p>
             <a:r>
               <a:rPr lang="en-US" dirty="0"/>
-              <a:t>Close on the next step you would take with this team in the first two weeks.</a:t>
+              <a:t>Be exact: accessibility is specified in both design systems but has not been audited. Handoff is tokens and documentation, not a verified sync. Team work is reviews and open requests, not a record of day-to-day collaboration.</a:t>
             </a:r>
             <a:endParaRPr lang="en-US" dirty="0"/>
           </a:p>
@@ -801,6 +802,94 @@
             <a:fld id="{F7021451-1387-4CA6-816F-3879F97B5CBC}" type="slidenum">
               <a:rPr lang="en-US"/>
               <a:t>12</a:t>
+            </a:fld>
+            <a:endParaRPr lang="en-US"/>
+          </a:p>
+        </p:txBody>
+      </p:sp>
+    </p:spTree>
+    <p:extLst>
+      <p:ext uri="{BB962C8B-B14F-4D97-AF65-F5344CB8AC3E}">
+        <p14:creationId xmlns:p14="http://schemas.microsoft.com/office/powerpoint/2010/main" val="1024086991"/>
+      </p:ext>
+    </p:extLst>
+  </p:cSld>
+  <p:clrMapOvr>
+    <a:masterClrMapping/>
+  </p:clrMapOvr>
+</p:notes>
+</file>
+
+<file path=ppt/notesSlides/notesSlide13.xml><?xml version="1.0" encoding="utf-8"?>
+<p:notes xmlns:a="http://schemas.openxmlformats.org/drawingml/2006/main" xmlns:r="http://schemas.openxmlformats.org/officeDocument/2006/relationships" xmlns:p="http://schemas.openxmlformats.org/presentationml/2006/main">
+  <p:cSld>
+    <p:spTree>
+      <p:nvGrpSpPr>
+        <p:cNvPr id="1" name=""/>
+        <p:cNvGrpSpPr/>
+        <p:nvPr/>
+      </p:nvGrpSpPr>
+      <p:grpSpPr>
+        <a:xfrm>
+          <a:off x="0" y="0"/>
+          <a:ext cx="0" cy="0"/>
+          <a:chOff x="0" y="0"/>
+          <a:chExt cx="0" cy="0"/>
+        </a:xfrm>
+      </p:grpSpPr>
+      <p:sp>
+        <p:nvSpPr>
+          <p:cNvPr id="2" name="Slide Image Placeholder 1"/>
+          <p:cNvSpPr>
+            <a:spLocks noGrp="1" noRot="1" noChangeAspect="1"/>
+          </p:cNvSpPr>
+          <p:nvPr>
+            <p:ph type="sldImg"/>
+          </p:nvPr>
+        </p:nvSpPr>
+        <p:spPr/>
+      </p:sp>
+      <p:sp>
+        <p:nvSpPr>
+          <p:cNvPr id="3" name="Notes Placeholder 2"/>
+          <p:cNvSpPr>
+            <a:spLocks noGrp="1"/>
+          </p:cNvSpPr>
+          <p:nvPr>
+            <p:ph type="body" idx="1"/>
+          </p:nvPr>
+        </p:nvSpPr>
+        <p:spPr/>
+        <p:txBody>
+          <a:bodyPr/>
+          <a:lstStyle/>
+          <a:p>
+            <a:r>
+              <a:rPr lang="en-US" dirty="0"/>
+              <a:t>Close on the next step you would take with this team in the first two weeks.</a:t>
+            </a:r>
+            <a:endParaRPr lang="en-US" dirty="0"/>
+          </a:p>
+        </p:txBody>
+      </p:sp>
+      <p:sp>
+        <p:nvSpPr>
+          <p:cNvPr id="4" name="Slide Number Placeholder 3"/>
+          <p:cNvSpPr>
+            <a:spLocks noGrp="1"/>
+          </p:cNvSpPr>
+          <p:nvPr>
+            <p:ph type="sldNum" sz="quarter" idx="10"/>
+          </p:nvPr>
+        </p:nvSpPr>
+        <p:spPr/>
+        <p:txBody>
+          <a:bodyPr/>
+          <a:lstStyle/>
+          <a:p>
+            <a:fld id="{F7021451-1387-4CA6-816F-3879F97B5CBC}" type="slidenum">
+              <a:rPr lang="en-US"/>
+              <a:t>13</a:t>
             </a:fld>
             <a:endParaRPr lang="en-US"/>
           </a:p>
@@ -4123,6 +4212,512 @@
                 <a:ea typeface="Helvetica Neue" pitchFamily="34" charset="-122"/>
                 <a:cs typeface="Helvetica Neue" pitchFamily="34" charset="-120"/>
               </a:rPr>
+              <a:t>Standards and teams</a:t>
+            </a:r>
+            <a:endParaRPr lang="en-US" sz="1422" dirty="0"/>
+          </a:p>
+        </p:txBody>
+      </p:sp>
+      <p:sp>
+        <p:nvSpPr>
+          <p:cNvPr id="3" name="Text 1"/>
+          <p:cNvSpPr txBox="1"/>
+          <p:nvPr/>
+        </p:nvSpPr>
+        <p:spPr>
+          <a:xfrm>
+            <a:off x="457200" y="914400"/>
+            <a:ext cx="12070080" cy="594360"/>
+          </a:xfrm>
+          <a:prstGeom prst="rect">
+            <a:avLst/>
+          </a:prstGeom>
+          <a:noFill/>
+          <a:ln/>
+        </p:spPr>
+        <p:txBody>
+          <a:bodyPr wrap="square" lIns="0" tIns="0" rIns="0" bIns="0" rtlCol="0" anchor="t"/>
+          <a:lstStyle/>
+          <a:p>
+            <a:pPr indent="0" marL="0">
+              <a:buNone/>
+            </a:pPr>
+            <a:r>
+              <a:rPr lang="en-US" sz="3200" dirty="0">
+                <a:solidFill>
+                  <a:srgbClr val="1F1F1F"/>
+                </a:solidFill>
+                <a:latin typeface="Helvetica Neue Light" pitchFamily="34" charset="0"/>
+                <a:ea typeface="Helvetica Neue Light" pitchFamily="34" charset="-122"/>
+                <a:cs typeface="Helvetica Neue Light" pitchFamily="34" charset="-120"/>
+              </a:rPr>
+              <a:t>Accessibility, handoff, and working with teams</a:t>
+            </a:r>
+            <a:endParaRPr lang="en-US" sz="3200" dirty="0"/>
+          </a:p>
+        </p:txBody>
+      </p:sp>
+      <p:sp>
+        <p:nvSpPr>
+          <p:cNvPr id="4" name="Text 2"/>
+          <p:cNvSpPr txBox="1"/>
+          <p:nvPr/>
+        </p:nvSpPr>
+        <p:spPr>
+          <a:xfrm>
+            <a:off x="457200" y="1554480"/>
+            <a:ext cx="12070080" cy="365760"/>
+          </a:xfrm>
+          <a:prstGeom prst="rect">
+            <a:avLst/>
+          </a:prstGeom>
+          <a:noFill/>
+          <a:ln/>
+        </p:spPr>
+        <p:txBody>
+          <a:bodyPr wrap="square" lIns="0" tIns="0" rIns="0" bIns="0" rtlCol="0" anchor="t"/>
+          <a:lstStyle/>
+          <a:p>
+            <a:pPr indent="0" marL="0">
+              <a:buNone/>
+            </a:pPr>
+            <a:r>
+              <a:rPr lang="en-US" sz="1636" dirty="0">
+                <a:solidFill>
+                  <a:srgbClr val="595959"/>
+                </a:solidFill>
+                <a:latin typeface="Helvetica Neue Light" pitchFamily="34" charset="0"/>
+                <a:ea typeface="Helvetica Neue Light" pitchFamily="34" charset="-122"/>
+                <a:cs typeface="Helvetica Neue Light" pitchFamily="34" charset="-120"/>
+              </a:rPr>
+              <a:t>What is specified, what is in place, and what has not been checked yet.</a:t>
+            </a:r>
+            <a:endParaRPr lang="en-US" sz="1636" dirty="0"/>
+          </a:p>
+        </p:txBody>
+      </p:sp>
+      <p:pic>
+        <p:nvPicPr>
+          <p:cNvPr id="5" name="Image 0" descr="/tmp/meridian-deck/img/band-footer.png">    </p:cNvPr>
+          <p:cNvPicPr>
+            <a:picLocks noChangeAspect="1"/>
+          </p:cNvPicPr>
+          <p:nvPr/>
+        </p:nvPicPr>
+        <p:blipFill>
+          <a:blip r:embed="rId1"/>
+          <a:stretch>
+            <a:fillRect/>
+          </a:stretch>
+        </p:blipFill>
+        <p:spPr>
+          <a:xfrm>
+            <a:off x="0" y="9281160"/>
+            <a:ext cx="13004597" cy="466344"/>
+          </a:xfrm>
+          <a:prstGeom prst="rect">
+            <a:avLst/>
+          </a:prstGeom>
+        </p:spPr>
+      </p:pic>
+      <p:sp>
+        <p:nvSpPr>
+          <p:cNvPr id="7" name="Shape 3"/>
+          <p:cNvSpPr/>
+          <p:nvPr/>
+        </p:nvSpPr>
+        <p:spPr>
+          <a:xfrm>
+            <a:off x="457200" y="2560320"/>
+            <a:ext cx="12070080" cy="1920240"/>
+          </a:xfrm>
+          <a:prstGeom prst="rect">
+            <a:avLst/>
+          </a:prstGeom>
+          <a:solidFill>
+            <a:srgbClr val="FFFFFF"/>
+          </a:solidFill>
+          <a:ln w="12700">
+            <a:solidFill>
+              <a:srgbClr val="E2E2E2"/>
+            </a:solidFill>
+            <a:prstDash val="solid"/>
+          </a:ln>
+        </p:spPr>
+      </p:sp>
+      <p:sp>
+        <p:nvSpPr>
+          <p:cNvPr id="8" name="Text 4"/>
+          <p:cNvSpPr txBox="1"/>
+          <p:nvPr/>
+        </p:nvSpPr>
+        <p:spPr>
+          <a:xfrm>
+            <a:off x="731520" y="2761488"/>
+            <a:ext cx="11521440" cy="274320"/>
+          </a:xfrm>
+          <a:prstGeom prst="rect">
+            <a:avLst/>
+          </a:prstGeom>
+          <a:noFill/>
+          <a:ln/>
+        </p:spPr>
+        <p:txBody>
+          <a:bodyPr wrap="square" lIns="0" tIns="0" rIns="0" bIns="0" rtlCol="0" anchor="t"/>
+          <a:lstStyle/>
+          <a:p>
+            <a:pPr indent="0" marL="0">
+              <a:buNone/>
+            </a:pPr>
+            <a:r>
+              <a:rPr lang="en-US" sz="1280" b="1" spc="100" kern="0" dirty="0">
+                <a:solidFill>
+                  <a:srgbClr val="00868B"/>
+                </a:solidFill>
+                <a:latin typeface="Helvetica Neue" pitchFamily="34" charset="0"/>
+                <a:ea typeface="Helvetica Neue" pitchFamily="34" charset="-122"/>
+                <a:cs typeface="Helvetica Neue" pitchFamily="34" charset="-120"/>
+              </a:rPr>
+              <a:t>ACCESSIBILITY</a:t>
+            </a:r>
+            <a:endParaRPr lang="en-US" sz="1280" dirty="0"/>
+          </a:p>
+        </p:txBody>
+      </p:sp>
+      <p:sp>
+        <p:nvSpPr>
+          <p:cNvPr id="9" name="Text 5"/>
+          <p:cNvSpPr txBox="1"/>
+          <p:nvPr/>
+        </p:nvSpPr>
+        <p:spPr>
+          <a:xfrm>
+            <a:off x="731520" y="3108960"/>
+            <a:ext cx="11521440" cy="1234440"/>
+          </a:xfrm>
+          <a:prstGeom prst="rect">
+            <a:avLst/>
+          </a:prstGeom>
+          <a:noFill/>
+          <a:ln/>
+        </p:spPr>
+        <p:txBody>
+          <a:bodyPr wrap="square" lIns="0" tIns="0" rIns="0" bIns="0" rtlCol="0" anchor="t"/>
+          <a:lstStyle/>
+          <a:p>
+            <a:pPr indent="0" marL="0">
+              <a:buNone/>
+            </a:pPr>
+            <a:r>
+              <a:rPr lang="en-US" sz="1700" dirty="0">
+                <a:solidFill>
+                  <a:srgbClr val="1F1F1F"/>
+                </a:solidFill>
+                <a:latin typeface="Helvetica Neue Light" pitchFamily="34" charset="0"/>
+                <a:ea typeface="Helvetica Neue Light" pitchFamily="34" charset="-122"/>
+                <a:cs typeface="Helvetica Neue Light" pitchFamily="34" charset="-120"/>
+              </a:rPr>
+              <a:t>Specified: WCAG 2.2 AA in the FinViz design system (4.5:1 text contrast, 24px targets), and WCAG AA with ARIA labels in Meridian. Not audited.</a:t>
+            </a:r>
+            <a:endParaRPr lang="en-US" sz="1700" dirty="0"/>
+          </a:p>
+        </p:txBody>
+      </p:sp>
+      <p:sp>
+        <p:nvSpPr>
+          <p:cNvPr id="10" name="Shape 6"/>
+          <p:cNvSpPr/>
+          <p:nvPr/>
+        </p:nvSpPr>
+        <p:spPr>
+          <a:xfrm>
+            <a:off x="457200" y="4754880"/>
+            <a:ext cx="12070080" cy="1920240"/>
+          </a:xfrm>
+          <a:prstGeom prst="rect">
+            <a:avLst/>
+          </a:prstGeom>
+          <a:solidFill>
+            <a:srgbClr val="FFFFFF"/>
+          </a:solidFill>
+          <a:ln w="12700">
+            <a:solidFill>
+              <a:srgbClr val="E2E2E2"/>
+            </a:solidFill>
+            <a:prstDash val="solid"/>
+          </a:ln>
+        </p:spPr>
+      </p:sp>
+      <p:sp>
+        <p:nvSpPr>
+          <p:cNvPr id="11" name="Text 7"/>
+          <p:cNvSpPr txBox="1"/>
+          <p:nvPr/>
+        </p:nvSpPr>
+        <p:spPr>
+          <a:xfrm>
+            <a:off x="731520" y="4956048"/>
+            <a:ext cx="11521440" cy="274320"/>
+          </a:xfrm>
+          <a:prstGeom prst="rect">
+            <a:avLst/>
+          </a:prstGeom>
+          <a:noFill/>
+          <a:ln/>
+        </p:spPr>
+        <p:txBody>
+          <a:bodyPr wrap="square" lIns="0" tIns="0" rIns="0" bIns="0" rtlCol="0" anchor="t"/>
+          <a:lstStyle/>
+          <a:p>
+            <a:pPr indent="0" marL="0">
+              <a:buNone/>
+            </a:pPr>
+            <a:r>
+              <a:rPr lang="en-US" sz="1280" b="1" spc="100" kern="0" dirty="0">
+                <a:solidFill>
+                  <a:srgbClr val="5B3F96"/>
+                </a:solidFill>
+                <a:latin typeface="Helvetica Neue" pitchFamily="34" charset="0"/>
+                <a:ea typeface="Helvetica Neue" pitchFamily="34" charset="-122"/>
+                <a:cs typeface="Helvetica Neue" pitchFamily="34" charset="-120"/>
+              </a:rPr>
+              <a:t>HANDOFF</a:t>
+            </a:r>
+            <a:endParaRPr lang="en-US" sz="1280" dirty="0"/>
+          </a:p>
+        </p:txBody>
+      </p:sp>
+      <p:sp>
+        <p:nvSpPr>
+          <p:cNvPr id="12" name="Text 8"/>
+          <p:cNvSpPr txBox="1"/>
+          <p:nvPr/>
+        </p:nvSpPr>
+        <p:spPr>
+          <a:xfrm>
+            <a:off x="731520" y="5303520"/>
+            <a:ext cx="11521440" cy="1234440"/>
+          </a:xfrm>
+          <a:prstGeom prst="rect">
+            <a:avLst/>
+          </a:prstGeom>
+          <a:noFill/>
+          <a:ln/>
+        </p:spPr>
+        <p:txBody>
+          <a:bodyPr wrap="square" lIns="0" tIns="0" rIns="0" bIns="0" rtlCol="0" anchor="t"/>
+          <a:lstStyle/>
+          <a:p>
+            <a:pPr indent="0" marL="0">
+              <a:buNone/>
+            </a:pPr>
+            <a:r>
+              <a:rPr lang="en-US" sz="1700" dirty="0">
+                <a:solidFill>
+                  <a:srgbClr val="1F1F1F"/>
+                </a:solidFill>
+                <a:latin typeface="Helvetica Neue Light" pitchFamily="34" charset="0"/>
+                <a:ea typeface="Helvetica Neue Light" pitchFamily="34" charset="-122"/>
+                <a:cs typeface="Helvetica Neue Light" pitchFamily="34" charset="-120"/>
+              </a:rPr>
+              <a:t>In place: colors and spacing are defined as tokens in the design system, and the Figma file uses the same navy and cyan values. Not verified: a live sync between Figma and SwiftUI.</a:t>
+            </a:r>
+            <a:endParaRPr lang="en-US" sz="1700" dirty="0"/>
+          </a:p>
+        </p:txBody>
+      </p:sp>
+      <p:sp>
+        <p:nvSpPr>
+          <p:cNvPr id="13" name="Shape 9"/>
+          <p:cNvSpPr/>
+          <p:nvPr/>
+        </p:nvSpPr>
+        <p:spPr>
+          <a:xfrm>
+            <a:off x="457200" y="6949440"/>
+            <a:ext cx="12070080" cy="1920240"/>
+          </a:xfrm>
+          <a:prstGeom prst="rect">
+            <a:avLst/>
+          </a:prstGeom>
+          <a:solidFill>
+            <a:srgbClr val="FFFFFF"/>
+          </a:solidFill>
+          <a:ln w="12700">
+            <a:solidFill>
+              <a:srgbClr val="E2E2E2"/>
+            </a:solidFill>
+            <a:prstDash val="solid"/>
+          </a:ln>
+        </p:spPr>
+      </p:sp>
+      <p:sp>
+        <p:nvSpPr>
+          <p:cNvPr id="14" name="Text 10"/>
+          <p:cNvSpPr txBox="1"/>
+          <p:nvPr/>
+        </p:nvSpPr>
+        <p:spPr>
+          <a:xfrm>
+            <a:off x="731520" y="7150608"/>
+            <a:ext cx="11521440" cy="274320"/>
+          </a:xfrm>
+          <a:prstGeom prst="rect">
+            <a:avLst/>
+          </a:prstGeom>
+          <a:noFill/>
+          <a:ln/>
+        </p:spPr>
+        <p:txBody>
+          <a:bodyPr wrap="square" lIns="0" tIns="0" rIns="0" bIns="0" rtlCol="0" anchor="t"/>
+          <a:lstStyle/>
+          <a:p>
+            <a:pPr indent="0" marL="0">
+              <a:buNone/>
+            </a:pPr>
+            <a:r>
+              <a:rPr lang="en-US" sz="1280" b="1" spc="100" kern="0" dirty="0">
+                <a:solidFill>
+                  <a:srgbClr val="C45A35"/>
+                </a:solidFill>
+                <a:latin typeface="Helvetica Neue" pitchFamily="34" charset="0"/>
+                <a:ea typeface="Helvetica Neue" pitchFamily="34" charset="-122"/>
+                <a:cs typeface="Helvetica Neue" pitchFamily="34" charset="-120"/>
+              </a:rPr>
+              <a:t>TEAMS AND COMPLIANCE</a:t>
+            </a:r>
+            <a:endParaRPr lang="en-US" sz="1280" dirty="0"/>
+          </a:p>
+        </p:txBody>
+      </p:sp>
+      <p:sp>
+        <p:nvSpPr>
+          <p:cNvPr id="15" name="Text 11"/>
+          <p:cNvSpPr txBox="1"/>
+          <p:nvPr/>
+        </p:nvSpPr>
+        <p:spPr>
+          <a:xfrm>
+            <a:off x="731520" y="7498080"/>
+            <a:ext cx="11521440" cy="1234440"/>
+          </a:xfrm>
+          <a:prstGeom prst="rect">
+            <a:avLst/>
+          </a:prstGeom>
+          <a:noFill/>
+          <a:ln/>
+        </p:spPr>
+        <p:txBody>
+          <a:bodyPr wrap="square" lIns="0" tIns="0" rIns="0" bIns="0" rtlCol="0" anchor="t"/>
+          <a:lstStyle/>
+          <a:p>
+            <a:pPr indent="0" marL="0">
+              <a:buNone/>
+            </a:pPr>
+            <a:r>
+              <a:rPr lang="en-US" sz="1700" dirty="0">
+                <a:solidFill>
+                  <a:srgbClr val="1F1F1F"/>
+                </a:solidFill>
+                <a:latin typeface="Helvetica Neue Light" pitchFamily="34" charset="0"/>
+                <a:ea typeface="Helvetica Neue Light" pitchFamily="34" charset="-122"/>
+                <a:cs typeface="Helvetica Neue Light" pitchFamily="34" charset="-120"/>
+              </a:rPr>
+              <a:t>Reviews: four reviewers commented on the FinViz boards on 30 Sept. Open: the advice line is waiting on compliance review. Day-to-day work with PMs and engineers is not documented in the project files.</a:t>
+            </a:r>
+            <a:endParaRPr lang="en-US" sz="1700" dirty="0"/>
+          </a:p>
+        </p:txBody>
+      </p:sp>
+      <p:pic>
+        <p:nvPicPr>
+          <p:cNvPr id="16" name="Image 1" descr="/tmp/meridian-deck/img/band-footer.png">    </p:cNvPr>
+          <p:cNvPicPr>
+            <a:picLocks noChangeAspect="1"/>
+          </p:cNvPicPr>
+          <p:nvPr/>
+        </p:nvPicPr>
+        <p:blipFill>
+          <a:blip r:embed="rId2"/>
+          <a:stretch>
+            <a:fillRect/>
+          </a:stretch>
+        </p:blipFill>
+        <p:spPr>
+          <a:xfrm>
+            <a:off x="0" y="9281160"/>
+            <a:ext cx="13004597" cy="466344"/>
+          </a:xfrm>
+          <a:prstGeom prst="rect">
+            <a:avLst/>
+          </a:prstGeom>
+        </p:spPr>
+      </p:pic>
+    </p:spTree>
+  </p:cSld>
+  <p:clrMapOvr>
+    <a:masterClrMapping/>
+  </p:clrMapOvr>
+</p:sld>
+</file>
+
+<file path=ppt/slides/slide13.xml><?xml version="1.0" encoding="utf-8"?>
+<p:sld xmlns:a="http://schemas.openxmlformats.org/drawingml/2006/main" xmlns:r="http://schemas.openxmlformats.org/officeDocument/2006/relationships" xmlns:p="http://schemas.openxmlformats.org/presentationml/2006/main">
+  <p:cSld name="Slide 13">
+    <p:bg>
+      <p:bgPr>
+        <a:solidFill>
+          <a:srgbClr val="FFFFFF"/>
+        </a:solidFill>
+      </p:bgPr>
+    </p:bg>
+    <p:spTree>
+      <p:nvGrpSpPr>
+        <p:cNvPr id="1" name=""/>
+        <p:cNvGrpSpPr/>
+        <p:nvPr/>
+      </p:nvGrpSpPr>
+      <p:grpSpPr>
+        <a:xfrm>
+          <a:off x="0" y="0"/>
+          <a:ext cx="0" cy="0"/>
+          <a:chOff x="0" y="0"/>
+          <a:chExt cx="0" cy="0"/>
+        </a:xfrm>
+      </p:grpSpPr>
+      <p:sp>
+        <p:nvSpPr>
+          <p:cNvPr id="2" name="Text 0"/>
+          <p:cNvSpPr txBox="1"/>
+          <p:nvPr/>
+        </p:nvSpPr>
+        <p:spPr>
+          <a:xfrm>
+            <a:off x="457200" y="393192"/>
+            <a:ext cx="10424160" cy="274320"/>
+          </a:xfrm>
+          <a:prstGeom prst="rect">
+            <a:avLst/>
+          </a:prstGeom>
+          <a:noFill/>
+          <a:ln/>
+        </p:spPr>
+        <p:txBody>
+          <a:bodyPr wrap="square" lIns="0" tIns="0" rIns="0" bIns="0" rtlCol="0" anchor="t"/>
+          <a:lstStyle/>
+          <a:p>
+            <a:pPr indent="0" marL="0">
+              <a:buNone/>
+            </a:pPr>
+            <a:r>
+              <a:rPr lang="en-US" sz="1422" dirty="0">
+                <a:solidFill>
+                  <a:srgbClr val="1F1F1F"/>
+                </a:solidFill>
+                <a:latin typeface="Helvetica Neue" pitchFamily="34" charset="0"/>
+                <a:ea typeface="Helvetica Neue" pitchFamily="34" charset="-122"/>
+                <a:cs typeface="Helvetica Neue" pitchFamily="34" charset="-120"/>
+              </a:rPr>
               <a:t>Next steps</a:t>
             </a:r>
             <a:endParaRPr lang="en-US" sz="1422" dirty="0"/>

--- a/Portfolio-Highlights.pptx
+++ b/Portfolio-Highlights.pptx
@@ -18,9 +18,10 @@
     <p:sldId id="266" r:id="rId12"/>
     <p:sldId id="267" r:id="rId13"/>
     <p:sldId id="268" r:id="rId14"/>
+    <p:sldId id="269" r:id="rId15"/>
   </p:sldIdLst>
   <p:notesMasterIdLst>
-    <p:notesMasterId r:id="rId15"/>
+    <p:notesMasterId r:id="rId16"/>
   </p:notesMasterIdLst>
   <p:sldSz cx="13004597" cy="9753905"/>
   <p:notesSz cx="9753905" cy="13004597"/>
@@ -866,7 +867,7 @@
           <a:p>
             <a:r>
               <a:rPr lang="en-US" dirty="0"/>
-              <a:t>Close on the next step you would take with this team in the first two weeks.</a:t>
+              <a:t>Name the breakdowns first: outputs without reasoning, all-or-nothing Adapt, no learning loop, advice wording in conflict, and lost context. Then the four concepts. Be clear that the learning loop is a hypothesis, and the advice boundary is pending compliance.</a:t>
             </a:r>
             <a:endParaRPr lang="en-US" dirty="0"/>
           </a:p>
@@ -890,6 +891,94 @@
             <a:fld id="{F7021451-1387-4CA6-816F-3879F97B5CBC}" type="slidenum">
               <a:rPr lang="en-US"/>
               <a:t>13</a:t>
+            </a:fld>
+            <a:endParaRPr lang="en-US"/>
+          </a:p>
+        </p:txBody>
+      </p:sp>
+    </p:spTree>
+    <p:extLst>
+      <p:ext uri="{BB962C8B-B14F-4D97-AF65-F5344CB8AC3E}">
+        <p14:creationId xmlns:p14="http://schemas.microsoft.com/office/powerpoint/2010/main" val="1024086991"/>
+      </p:ext>
+    </p:extLst>
+  </p:cSld>
+  <p:clrMapOvr>
+    <a:masterClrMapping/>
+  </p:clrMapOvr>
+</p:notes>
+</file>
+
+<file path=ppt/notesSlides/notesSlide14.xml><?xml version="1.0" encoding="utf-8"?>
+<p:notes xmlns:a="http://schemas.openxmlformats.org/drawingml/2006/main" xmlns:r="http://schemas.openxmlformats.org/officeDocument/2006/relationships" xmlns:p="http://schemas.openxmlformats.org/presentationml/2006/main">
+  <p:cSld>
+    <p:spTree>
+      <p:nvGrpSpPr>
+        <p:cNvPr id="1" name=""/>
+        <p:cNvGrpSpPr/>
+        <p:nvPr/>
+      </p:nvGrpSpPr>
+      <p:grpSpPr>
+        <a:xfrm>
+          <a:off x="0" y="0"/>
+          <a:ext cx="0" cy="0"/>
+          <a:chOff x="0" y="0"/>
+          <a:chExt cx="0" cy="0"/>
+        </a:xfrm>
+      </p:grpSpPr>
+      <p:sp>
+        <p:nvSpPr>
+          <p:cNvPr id="2" name="Slide Image Placeholder 1"/>
+          <p:cNvSpPr>
+            <a:spLocks noGrp="1" noRot="1" noChangeAspect="1"/>
+          </p:cNvSpPr>
+          <p:nvPr>
+            <p:ph type="sldImg"/>
+          </p:nvPr>
+        </p:nvSpPr>
+        <p:spPr/>
+      </p:sp>
+      <p:sp>
+        <p:nvSpPr>
+          <p:cNvPr id="3" name="Notes Placeholder 2"/>
+          <p:cNvSpPr>
+            <a:spLocks noGrp="1"/>
+          </p:cNvSpPr>
+          <p:nvPr>
+            <p:ph type="body" idx="1"/>
+          </p:nvPr>
+        </p:nvSpPr>
+        <p:spPr/>
+        <p:txBody>
+          <a:bodyPr/>
+          <a:lstStyle/>
+          <a:p>
+            <a:r>
+              <a:rPr lang="en-US" dirty="0"/>
+              <a:t>Close on the next step you would take with this team in the first two weeks.</a:t>
+            </a:r>
+            <a:endParaRPr lang="en-US" dirty="0"/>
+          </a:p>
+        </p:txBody>
+      </p:sp>
+      <p:sp>
+        <p:nvSpPr>
+          <p:cNvPr id="4" name="Slide Number Placeholder 3"/>
+          <p:cNvSpPr>
+            <a:spLocks noGrp="1"/>
+          </p:cNvSpPr>
+          <p:nvPr>
+            <p:ph type="sldNum" sz="quarter" idx="10"/>
+          </p:nvPr>
+        </p:nvSpPr>
+        <p:spPr/>
+        <p:txBody>
+          <a:bodyPr/>
+          <a:lstStyle/>
+          <a:p>
+            <a:fld id="{F7021451-1387-4CA6-816F-3879F97B5CBC}" type="slidenum">
+              <a:rPr lang="en-US"/>
+              <a:t>14</a:t>
             </a:fld>
             <a:endParaRPr lang="en-US"/>
           </a:p>
@@ -4718,6 +4807,512 @@
                 <a:ea typeface="Helvetica Neue" pitchFamily="34" charset="-122"/>
                 <a:cs typeface="Helvetica Neue" pitchFamily="34" charset="-120"/>
               </a:rPr>
+              <a:t>Meridian Navigator · Agent experience</a:t>
+            </a:r>
+            <a:endParaRPr lang="en-US" sz="1422" dirty="0"/>
+          </a:p>
+        </p:txBody>
+      </p:sp>
+      <p:sp>
+        <p:nvSpPr>
+          <p:cNvPr id="3" name="Text 1"/>
+          <p:cNvSpPr txBox="1"/>
+          <p:nvPr/>
+        </p:nvSpPr>
+        <p:spPr>
+          <a:xfrm>
+            <a:off x="457200" y="914400"/>
+            <a:ext cx="12070080" cy="594360"/>
+          </a:xfrm>
+          <a:prstGeom prst="rect">
+            <a:avLst/>
+          </a:prstGeom>
+          <a:noFill/>
+          <a:ln/>
+        </p:spPr>
+        <p:txBody>
+          <a:bodyPr wrap="square" lIns="0" tIns="0" rIns="0" bIns="0" rtlCol="0" anchor="t"/>
+          <a:lstStyle/>
+          <a:p>
+            <a:pPr indent="0" marL="0">
+              <a:buNone/>
+            </a:pPr>
+            <a:r>
+              <a:rPr lang="en-US" sz="3200" dirty="0">
+                <a:solidFill>
+                  <a:srgbClr val="1F1F1F"/>
+                </a:solidFill>
+                <a:latin typeface="Helvetica Neue Light" pitchFamily="34" charset="0"/>
+                <a:ea typeface="Helvetica Neue Light" pitchFamily="34" charset="-122"/>
+                <a:cs typeface="Helvetica Neue Light" pitchFamily="34" charset="-120"/>
+              </a:rPr>
+              <a:t>An AI that shows its reasoning and waits for approval</a:t>
+            </a:r>
+            <a:endParaRPr lang="en-US" sz="3200" dirty="0"/>
+          </a:p>
+        </p:txBody>
+      </p:sp>
+      <p:sp>
+        <p:nvSpPr>
+          <p:cNvPr id="4" name="Text 2"/>
+          <p:cNvSpPr txBox="1"/>
+          <p:nvPr/>
+        </p:nvSpPr>
+        <p:spPr>
+          <a:xfrm>
+            <a:off x="457200" y="1554480"/>
+            <a:ext cx="12070080" cy="365760"/>
+          </a:xfrm>
+          <a:prstGeom prst="rect">
+            <a:avLst/>
+          </a:prstGeom>
+          <a:noFill/>
+          <a:ln/>
+        </p:spPr>
+        <p:txBody>
+          <a:bodyPr wrap="square" lIns="0" tIns="0" rIns="0" bIns="0" rtlCol="0" anchor="t"/>
+          <a:lstStyle/>
+          <a:p>
+            <a:pPr indent="0" marL="0">
+              <a:buNone/>
+            </a:pPr>
+            <a:r>
+              <a:rPr lang="en-US" sz="1636" dirty="0">
+                <a:solidFill>
+                  <a:srgbClr val="595959"/>
+                </a:solidFill>
+                <a:latin typeface="Helvetica Neue Light" pitchFamily="34" charset="0"/>
+                <a:ea typeface="Helvetica Neue Light" pitchFamily="34" charset="-122"/>
+                <a:cs typeface="Helvetica Neue Light" pitchFamily="34" charset="-120"/>
+              </a:rPr>
+              <a:t>Adapt becomes a plan the user steers. Insight shows its evidence. Each order carries its reason. Mock data throughout.</a:t>
+            </a:r>
+            <a:endParaRPr lang="en-US" sz="1636" dirty="0"/>
+          </a:p>
+        </p:txBody>
+      </p:sp>
+      <p:pic>
+        <p:nvPicPr>
+          <p:cNvPr id="5" name="Image 0" descr="/tmp/meridian-deck/img/band-footer.png">    </p:cNvPr>
+          <p:cNvPicPr>
+            <a:picLocks noChangeAspect="1"/>
+          </p:cNvPicPr>
+          <p:nvPr/>
+        </p:nvPicPr>
+        <p:blipFill>
+          <a:blip r:embed="rId1"/>
+          <a:stretch>
+            <a:fillRect/>
+          </a:stretch>
+        </p:blipFill>
+        <p:spPr>
+          <a:xfrm>
+            <a:off x="0" y="9281160"/>
+            <a:ext cx="13004597" cy="466344"/>
+          </a:xfrm>
+          <a:prstGeom prst="rect">
+            <a:avLst/>
+          </a:prstGeom>
+        </p:spPr>
+      </p:pic>
+      <p:sp>
+        <p:nvSpPr>
+          <p:cNvPr id="7" name="Shape 3"/>
+          <p:cNvSpPr/>
+          <p:nvPr/>
+        </p:nvSpPr>
+        <p:spPr>
+          <a:xfrm>
+            <a:off x="457200" y="2560320"/>
+            <a:ext cx="12070080" cy="1828800"/>
+          </a:xfrm>
+          <a:prstGeom prst="rect">
+            <a:avLst/>
+          </a:prstGeom>
+          <a:solidFill>
+            <a:srgbClr val="FFFFFF"/>
+          </a:solidFill>
+          <a:ln w="12700">
+            <a:solidFill>
+              <a:srgbClr val="E2E2E2"/>
+            </a:solidFill>
+            <a:prstDash val="solid"/>
+          </a:ln>
+        </p:spPr>
+      </p:sp>
+      <p:sp>
+        <p:nvSpPr>
+          <p:cNvPr id="8" name="Text 4"/>
+          <p:cNvSpPr txBox="1"/>
+          <p:nvPr/>
+        </p:nvSpPr>
+        <p:spPr>
+          <a:xfrm>
+            <a:off x="731520" y="2761488"/>
+            <a:ext cx="11521440" cy="274320"/>
+          </a:xfrm>
+          <a:prstGeom prst="rect">
+            <a:avLst/>
+          </a:prstGeom>
+          <a:noFill/>
+          <a:ln/>
+        </p:spPr>
+        <p:txBody>
+          <a:bodyPr wrap="square" lIns="0" tIns="0" rIns="0" bIns="0" rtlCol="0" anchor="t"/>
+          <a:lstStyle/>
+          <a:p>
+            <a:pPr indent="0" marL="0">
+              <a:buNone/>
+            </a:pPr>
+            <a:r>
+              <a:rPr lang="en-US" sz="1280" b="1" spc="100" kern="0" dirty="0">
+                <a:solidFill>
+                  <a:srgbClr val="C45A35"/>
+                </a:solidFill>
+                <a:latin typeface="Helvetica Neue" pitchFamily="34" charset="0"/>
+                <a:ea typeface="Helvetica Neue" pitchFamily="34" charset="-122"/>
+                <a:cs typeface="Helvetica Neue" pitchFamily="34" charset="-120"/>
+              </a:rPr>
+              <a:t>PROBLEM</a:t>
+            </a:r>
+            <a:endParaRPr lang="en-US" sz="1280" dirty="0"/>
+          </a:p>
+        </p:txBody>
+      </p:sp>
+      <p:sp>
+        <p:nvSpPr>
+          <p:cNvPr id="9" name="Text 5"/>
+          <p:cNvSpPr txBox="1"/>
+          <p:nvPr/>
+        </p:nvSpPr>
+        <p:spPr>
+          <a:xfrm>
+            <a:off x="731520" y="3108960"/>
+            <a:ext cx="11521440" cy="1143000"/>
+          </a:xfrm>
+          <a:prstGeom prst="rect">
+            <a:avLst/>
+          </a:prstGeom>
+          <a:noFill/>
+          <a:ln/>
+        </p:spPr>
+        <p:txBody>
+          <a:bodyPr wrap="square" lIns="0" tIns="0" rIns="0" bIns="0" rtlCol="0" anchor="t"/>
+          <a:lstStyle/>
+          <a:p>
+            <a:pPr indent="0" marL="0">
+              <a:buNone/>
+            </a:pPr>
+            <a:r>
+              <a:rPr lang="en-US" sz="1700" dirty="0">
+                <a:solidFill>
+                  <a:srgbClr val="1F1F1F"/>
+                </a:solidFill>
+                <a:latin typeface="Helvetica Neue Light" pitchFamily="34" charset="0"/>
+                <a:ea typeface="Helvetica Neue Light" pitchFamily="34" charset="-122"/>
+                <a:cs typeface="Helvetica Neue Light" pitchFamily="34" charset="-120"/>
+              </a:rPr>
+              <a:t>Insight shows conclusions without evidence. Adapt is approve-or-dismiss for a batch of trades. Dismissals teach nothing. Orders lose their reason.</a:t>
+            </a:r>
+            <a:endParaRPr lang="en-US" sz="1700" dirty="0"/>
+          </a:p>
+        </p:txBody>
+      </p:sp>
+      <p:sp>
+        <p:nvSpPr>
+          <p:cNvPr id="10" name="Shape 6"/>
+          <p:cNvSpPr/>
+          <p:nvPr/>
+        </p:nvSpPr>
+        <p:spPr>
+          <a:xfrm>
+            <a:off x="457200" y="4663440"/>
+            <a:ext cx="12070080" cy="1828800"/>
+          </a:xfrm>
+          <a:prstGeom prst="rect">
+            <a:avLst/>
+          </a:prstGeom>
+          <a:solidFill>
+            <a:srgbClr val="FFFFFF"/>
+          </a:solidFill>
+          <a:ln w="12700">
+            <a:solidFill>
+              <a:srgbClr val="E2E2E2"/>
+            </a:solidFill>
+            <a:prstDash val="solid"/>
+          </a:ln>
+        </p:spPr>
+      </p:sp>
+      <p:sp>
+        <p:nvSpPr>
+          <p:cNvPr id="11" name="Text 7"/>
+          <p:cNvSpPr txBox="1"/>
+          <p:nvPr/>
+        </p:nvSpPr>
+        <p:spPr>
+          <a:xfrm>
+            <a:off x="731520" y="4864608"/>
+            <a:ext cx="11521440" cy="274320"/>
+          </a:xfrm>
+          <a:prstGeom prst="rect">
+            <a:avLst/>
+          </a:prstGeom>
+          <a:noFill/>
+          <a:ln/>
+        </p:spPr>
+        <p:txBody>
+          <a:bodyPr wrap="square" lIns="0" tIns="0" rIns="0" bIns="0" rtlCol="0" anchor="t"/>
+          <a:lstStyle/>
+          <a:p>
+            <a:pPr indent="0" marL="0">
+              <a:buNone/>
+            </a:pPr>
+            <a:r>
+              <a:rPr lang="en-US" sz="1280" b="1" spc="100" kern="0" dirty="0">
+                <a:solidFill>
+                  <a:srgbClr val="5B3F96"/>
+                </a:solidFill>
+                <a:latin typeface="Helvetica Neue" pitchFamily="34" charset="0"/>
+                <a:ea typeface="Helvetica Neue" pitchFamily="34" charset="-122"/>
+                <a:cs typeface="Helvetica Neue" pitchFamily="34" charset="-120"/>
+              </a:rPr>
+              <a:t>DECISION</a:t>
+            </a:r>
+            <a:endParaRPr lang="en-US" sz="1280" dirty="0"/>
+          </a:p>
+        </p:txBody>
+      </p:sp>
+      <p:sp>
+        <p:nvSpPr>
+          <p:cNvPr id="12" name="Text 8"/>
+          <p:cNvSpPr txBox="1"/>
+          <p:nvPr/>
+        </p:nvSpPr>
+        <p:spPr>
+          <a:xfrm>
+            <a:off x="731520" y="5212080"/>
+            <a:ext cx="11521440" cy="1143000"/>
+          </a:xfrm>
+          <a:prstGeom prst="rect">
+            <a:avLst/>
+          </a:prstGeom>
+          <a:noFill/>
+          <a:ln/>
+        </p:spPr>
+        <p:txBody>
+          <a:bodyPr wrap="square" lIns="0" tIns="0" rIns="0" bIns="0" rtlCol="0" anchor="t"/>
+          <a:lstStyle/>
+          <a:p>
+            <a:pPr indent="0" marL="0">
+              <a:buNone/>
+            </a:pPr>
+            <a:r>
+              <a:rPr lang="en-US" sz="1700" dirty="0">
+                <a:solidFill>
+                  <a:srgbClr val="1F1F1F"/>
+                </a:solidFill>
+                <a:latin typeface="Helvetica Neue Light" pitchFamily="34" charset="0"/>
+                <a:ea typeface="Helvetica Neue Light" pitchFamily="34" charset="-122"/>
+                <a:cs typeface="Helvetica Neue Light" pitchFamily="34" charset="-120"/>
+              </a:rPr>
+              <a:t>Goal to plan, with editable steps. Visible autonomy levels. Evidence on every output. Orders that carry their reason. A reviewable list of learned rules.</a:t>
+            </a:r>
+            <a:endParaRPr lang="en-US" sz="1700" dirty="0"/>
+          </a:p>
+        </p:txBody>
+      </p:sp>
+      <p:sp>
+        <p:nvSpPr>
+          <p:cNvPr id="13" name="Shape 9"/>
+          <p:cNvSpPr/>
+          <p:nvPr/>
+        </p:nvSpPr>
+        <p:spPr>
+          <a:xfrm>
+            <a:off x="457200" y="6766560"/>
+            <a:ext cx="12070080" cy="1828800"/>
+          </a:xfrm>
+          <a:prstGeom prst="rect">
+            <a:avLst/>
+          </a:prstGeom>
+          <a:solidFill>
+            <a:srgbClr val="FFFFFF"/>
+          </a:solidFill>
+          <a:ln w="12700">
+            <a:solidFill>
+              <a:srgbClr val="E2E2E2"/>
+            </a:solidFill>
+            <a:prstDash val="solid"/>
+          </a:ln>
+        </p:spPr>
+      </p:sp>
+      <p:sp>
+        <p:nvSpPr>
+          <p:cNvPr id="14" name="Text 10"/>
+          <p:cNvSpPr txBox="1"/>
+          <p:nvPr/>
+        </p:nvSpPr>
+        <p:spPr>
+          <a:xfrm>
+            <a:off x="731520" y="6967728"/>
+            <a:ext cx="11521440" cy="274320"/>
+          </a:xfrm>
+          <a:prstGeom prst="rect">
+            <a:avLst/>
+          </a:prstGeom>
+          <a:noFill/>
+          <a:ln/>
+        </p:spPr>
+        <p:txBody>
+          <a:bodyPr wrap="square" lIns="0" tIns="0" rIns="0" bIns="0" rtlCol="0" anchor="t"/>
+          <a:lstStyle/>
+          <a:p>
+            <a:pPr indent="0" marL="0">
+              <a:buNone/>
+            </a:pPr>
+            <a:r>
+              <a:rPr lang="en-US" sz="1280" b="1" spc="100" kern="0" dirty="0">
+                <a:solidFill>
+                  <a:srgbClr val="00868B"/>
+                </a:solidFill>
+                <a:latin typeface="Helvetica Neue" pitchFamily="34" charset="0"/>
+                <a:ea typeface="Helvetica Neue" pitchFamily="34" charset="-122"/>
+                <a:cs typeface="Helvetica Neue" pitchFamily="34" charset="-120"/>
+              </a:rPr>
+              <a:t>RESULT</a:t>
+            </a:r>
+            <a:endParaRPr lang="en-US" sz="1280" dirty="0"/>
+          </a:p>
+        </p:txBody>
+      </p:sp>
+      <p:sp>
+        <p:nvSpPr>
+          <p:cNvPr id="15" name="Text 11"/>
+          <p:cNvSpPr txBox="1"/>
+          <p:nvPr/>
+        </p:nvSpPr>
+        <p:spPr>
+          <a:xfrm>
+            <a:off x="731520" y="7315200"/>
+            <a:ext cx="11521440" cy="1143000"/>
+          </a:xfrm>
+          <a:prstGeom prst="rect">
+            <a:avLst/>
+          </a:prstGeom>
+          <a:noFill/>
+          <a:ln/>
+        </p:spPr>
+        <p:txBody>
+          <a:bodyPr wrap="square" lIns="0" tIns="0" rIns="0" bIns="0" rtlCol="0" anchor="t"/>
+          <a:lstStyle/>
+          <a:p>
+            <a:pPr indent="0" marL="0">
+              <a:buNone/>
+            </a:pPr>
+            <a:r>
+              <a:rPr lang="en-US" sz="1700" dirty="0">
+                <a:solidFill>
+                  <a:srgbClr val="1F1F1F"/>
+                </a:solidFill>
+                <a:latin typeface="Helvetica Neue Light" pitchFamily="34" charset="0"/>
+                <a:ea typeface="Helvetica Neue Light" pitchFamily="34" charset="-122"/>
+                <a:cs typeface="Helvetica Neue Light" pitchFamily="34" charset="-120"/>
+              </a:rPr>
+              <a:t>Clickable Figma wireframes for the plan, review, evidence and learned-rules flows. Effects are planned measures, not results.</a:t>
+            </a:r>
+            <a:endParaRPr lang="en-US" sz="1700" dirty="0"/>
+          </a:p>
+        </p:txBody>
+      </p:sp>
+      <p:pic>
+        <p:nvPicPr>
+          <p:cNvPr id="16" name="Image 1" descr="/tmp/meridian-deck/img/band-footer.png">    </p:cNvPr>
+          <p:cNvPicPr>
+            <a:picLocks noChangeAspect="1"/>
+          </p:cNvPicPr>
+          <p:nvPr/>
+        </p:nvPicPr>
+        <p:blipFill>
+          <a:blip r:embed="rId2"/>
+          <a:stretch>
+            <a:fillRect/>
+          </a:stretch>
+        </p:blipFill>
+        <p:spPr>
+          <a:xfrm>
+            <a:off x="0" y="9281160"/>
+            <a:ext cx="13004597" cy="466344"/>
+          </a:xfrm>
+          <a:prstGeom prst="rect">
+            <a:avLst/>
+          </a:prstGeom>
+        </p:spPr>
+      </p:pic>
+    </p:spTree>
+  </p:cSld>
+  <p:clrMapOvr>
+    <a:masterClrMapping/>
+  </p:clrMapOvr>
+</p:sld>
+</file>
+
+<file path=ppt/slides/slide14.xml><?xml version="1.0" encoding="utf-8"?>
+<p:sld xmlns:a="http://schemas.openxmlformats.org/drawingml/2006/main" xmlns:r="http://schemas.openxmlformats.org/officeDocument/2006/relationships" xmlns:p="http://schemas.openxmlformats.org/presentationml/2006/main">
+  <p:cSld name="Slide 14">
+    <p:bg>
+      <p:bgPr>
+        <a:solidFill>
+          <a:srgbClr val="FFFFFF"/>
+        </a:solidFill>
+      </p:bgPr>
+    </p:bg>
+    <p:spTree>
+      <p:nvGrpSpPr>
+        <p:cNvPr id="1" name=""/>
+        <p:cNvGrpSpPr/>
+        <p:nvPr/>
+      </p:nvGrpSpPr>
+      <p:grpSpPr>
+        <a:xfrm>
+          <a:off x="0" y="0"/>
+          <a:ext cx="0" cy="0"/>
+          <a:chOff x="0" y="0"/>
+          <a:chExt cx="0" cy="0"/>
+        </a:xfrm>
+      </p:grpSpPr>
+      <p:sp>
+        <p:nvSpPr>
+          <p:cNvPr id="2" name="Text 0"/>
+          <p:cNvSpPr txBox="1"/>
+          <p:nvPr/>
+        </p:nvSpPr>
+        <p:spPr>
+          <a:xfrm>
+            <a:off x="457200" y="393192"/>
+            <a:ext cx="10424160" cy="274320"/>
+          </a:xfrm>
+          <a:prstGeom prst="rect">
+            <a:avLst/>
+          </a:prstGeom>
+          <a:noFill/>
+          <a:ln/>
+        </p:spPr>
+        <p:txBody>
+          <a:bodyPr wrap="square" lIns="0" tIns="0" rIns="0" bIns="0" rtlCol="0" anchor="t"/>
+          <a:lstStyle/>
+          <a:p>
+            <a:pPr indent="0" marL="0">
+              <a:buNone/>
+            </a:pPr>
+            <a:r>
+              <a:rPr lang="en-US" sz="1422" dirty="0">
+                <a:solidFill>
+                  <a:srgbClr val="1F1F1F"/>
+                </a:solidFill>
+                <a:latin typeface="Helvetica Neue" pitchFamily="34" charset="0"/>
+                <a:ea typeface="Helvetica Neue" pitchFamily="34" charset="-122"/>
+                <a:cs typeface="Helvetica Neue" pitchFamily="34" charset="-120"/>
+              </a:rPr>
               <a:t>Next steps</a:t>
             </a:r>
             <a:endParaRPr lang="en-US" sz="1422" dirty="0"/>
